--- a/FIG-TESPN社會科教學包_工作坊簡報.pptx
+++ b/FIG-TESPN社會科教學包_工作坊簡報.pptx
@@ -5949,7 +5949,7 @@
                 <a:ea typeface="Calibri" pitchFamily="34" charset="-122"/>
                 <a:cs typeface="Calibri" pitchFamily="34" charset="-120"/>
               </a:rPr>
-              <a:t>五年級歷史分量重，進度壓力大</a:t>
+              <a:t>高年級歷史分量重，進度壓力大</a:t>
             </a:r>
             <a:endParaRPr lang="en-US" sz="1650" dirty="0"/>
           </a:p>
@@ -8894,7 +8894,7 @@
                 <a:ea typeface="Calibri" pitchFamily="34" charset="-122"/>
                 <a:cs typeface="Calibri" pitchFamily="34" charset="-120"/>
               </a:rPr>
-              <a:t>I 看清處境 · N 檢視結果</a:t>
+              <a:t>I 看清處境 · G 目標</a:t>
             </a:r>
             <a:endParaRPr lang="en-US" sz="1450" dirty="0"/>
           </a:p>
@@ -9091,7 +9091,7 @@
                 <a:ea typeface="Calibri" pitchFamily="34" charset="-122"/>
                 <a:cs typeface="Calibri" pitchFamily="34" charset="-120"/>
               </a:rPr>
-              <a:t>T 想清楚再決定 · P 計畫行動</a:t>
+              <a:t>G 訂目標 · P 計畫行動</a:t>
             </a:r>
             <a:endParaRPr lang="en-US" sz="1450" dirty="0"/>
           </a:p>
@@ -9485,7 +9485,7 @@
                 <a:ea typeface="Calibri" pitchFamily="34" charset="-122"/>
                 <a:cs typeface="Calibri" pitchFamily="34" charset="-120"/>
               </a:rPr>
-              <a:t>G 目標 · E 後果 · S 選擇</a:t>
+              <a:t>T 方法 · E 後果 · S 選擇 · N 檢視</a:t>
             </a:r>
             <a:endParaRPr lang="en-US" sz="1450" dirty="0"/>
           </a:p>
